--- a/skills/brief_deck/templates/navy-gold.pptx
+++ b/skills/brief_deck/templates/navy-gold.pptx
@@ -525,7 +525,7 @@
           <a:noFill/>
           <a:ln w="25400">
             <a:solidFill>
-              <a:srgbClr val="B5893B"/>
+              <a:srgbClr val="B9781A"/>
             </a:solidFill>
             <a:prstDash val="solid"/>
           </a:ln>
@@ -557,7 +557,7 @@
               <a:buNone/>
               <a:defRPr lang="en-US" sz="1000" b="1" spc="300" kern="0" dirty="0">
                 <a:solidFill>
-                  <a:srgbClr val="B5893B"/>
+                  <a:srgbClr val="B9781A"/>
                 </a:solidFill>
                 <a:latin typeface="Calibri" pitchFamily="34" charset="0"/>
                 <a:ea typeface="Calibri" pitchFamily="34" charset="-122"/>
@@ -704,7 +704,7 @@
             <a:r>
               <a:rPr lang="en-US" sz="4800" b="1" i="1" dirty="0">
                 <a:solidFill>
-                  <a:srgbClr val="B5893B"/>
+                  <a:srgbClr val="B9781A"/>
                 </a:solidFill>
                 <a:latin typeface="Cambria" pitchFamily="34" charset="0"/>
                 <a:ea typeface="Cambria" pitchFamily="34" charset="-122"/>
@@ -850,7 +850,7 @@
             <a:r>
               <a:rPr lang="en-US" sz="4800" b="1" i="1" dirty="0">
                 <a:solidFill>
-                  <a:srgbClr val="B5893B"/>
+                  <a:srgbClr val="B9781A"/>
                 </a:solidFill>
                 <a:latin typeface="Cambria" pitchFamily="34" charset="0"/>
                 <a:ea typeface="Cambria" pitchFamily="34" charset="-122"/>
@@ -996,7 +996,7 @@
             <a:r>
               <a:rPr lang="en-US" sz="4800" b="1" i="1" dirty="0">
                 <a:solidFill>
-                  <a:srgbClr val="B5893B"/>
+                  <a:srgbClr val="B9781A"/>
                 </a:solidFill>
                 <a:latin typeface="Cambria" pitchFamily="34" charset="0"/>
                 <a:ea typeface="Cambria" pitchFamily="34" charset="-122"/>
@@ -1212,7 +1212,7 @@
           <a:noFill/>
           <a:ln w="25400">
             <a:solidFill>
-              <a:srgbClr val="B5893B"/>
+              <a:srgbClr val="B9781A"/>
             </a:solidFill>
             <a:prstDash val="solid"/>
           </a:ln>
@@ -1244,7 +1244,7 @@
               <a:buNone/>
               <a:defRPr lang="en-US" sz="1000" b="1" spc="300" kern="0" dirty="0">
                 <a:solidFill>
-                  <a:srgbClr val="B5893B"/>
+                  <a:srgbClr val="B9781A"/>
                 </a:solidFill>
                 <a:latin typeface="Calibri" pitchFamily="34" charset="0"/>
                 <a:ea typeface="Calibri" pitchFamily="34" charset="-122"/>
@@ -1390,7 +1390,7 @@
               <a:buNone/>
               <a:defRPr lang="en-US" sz="1100" b="1" spc="200" kern="0" dirty="0">
                 <a:solidFill>
-                  <a:srgbClr val="B5893B"/>
+                  <a:srgbClr val="B9781A"/>
                 </a:solidFill>
                 <a:latin typeface="Calibri" pitchFamily="34" charset="0"/>
                 <a:ea typeface="Calibri" pitchFamily="34" charset="-122"/>
@@ -1516,7 +1516,7 @@
               <a:buNone/>
               <a:defRPr lang="en-US" sz="1100" b="1" spc="200" kern="0" dirty="0">
                 <a:solidFill>
-                  <a:srgbClr val="B5893B"/>
+                  <a:srgbClr val="B9781A"/>
                 </a:solidFill>
                 <a:latin typeface="Calibri" pitchFamily="34" charset="0"/>
                 <a:ea typeface="Calibri" pitchFamily="34" charset="-122"/>
@@ -1642,7 +1642,7 @@
               <a:buNone/>
               <a:defRPr lang="en-US" sz="1100" b="1" spc="200" kern="0" dirty="0">
                 <a:solidFill>
-                  <a:srgbClr val="B5893B"/>
+                  <a:srgbClr val="B9781A"/>
                 </a:solidFill>
                 <a:latin typeface="Calibri" pitchFamily="34" charset="0"/>
                 <a:ea typeface="Calibri" pitchFamily="34" charset="-122"/>
@@ -1768,7 +1768,7 @@
               <a:buNone/>
               <a:defRPr lang="en-US" sz="1100" b="1" spc="200" kern="0" dirty="0">
                 <a:solidFill>
-                  <a:srgbClr val="B5893B"/>
+                  <a:srgbClr val="B9781A"/>
                 </a:solidFill>
                 <a:latin typeface="Calibri" pitchFamily="34" charset="0"/>
                 <a:ea typeface="Calibri" pitchFamily="34" charset="-122"/>
@@ -1894,7 +1894,7 @@
               <a:buNone/>
               <a:defRPr lang="en-US" sz="1100" b="1" spc="200" kern="0" dirty="0">
                 <a:solidFill>
-                  <a:srgbClr val="B5893B"/>
+                  <a:srgbClr val="B9781A"/>
                 </a:solidFill>
                 <a:latin typeface="Calibri" pitchFamily="34" charset="0"/>
                 <a:ea typeface="Calibri" pitchFamily="34" charset="-122"/>
@@ -2091,7 +2091,7 @@
           <a:noFill/>
           <a:ln w="25400">
             <a:solidFill>
-              <a:srgbClr val="B5893B"/>
+              <a:srgbClr val="B9781A"/>
             </a:solidFill>
             <a:prstDash val="solid"/>
           </a:ln>
@@ -2123,7 +2123,7 @@
               <a:buNone/>
               <a:defRPr lang="en-US" sz="1000" b="1" spc="300" kern="0" dirty="0">
                 <a:solidFill>
-                  <a:srgbClr val="B5893B"/>
+                  <a:srgbClr val="B9781A"/>
                 </a:solidFill>
                 <a:latin typeface="Calibri" pitchFamily="34" charset="0"/>
                 <a:ea typeface="Calibri" pitchFamily="34" charset="-122"/>
@@ -2784,7 +2784,7 @@
           <a:noFill/>
           <a:ln w="25400">
             <a:solidFill>
-              <a:srgbClr val="B5893B"/>
+              <a:srgbClr val="B9781A"/>
             </a:solidFill>
             <a:prstDash val="solid"/>
           </a:ln>
@@ -2816,7 +2816,7 @@
               <a:buNone/>
               <a:defRPr lang="en-US" sz="1000" b="1" spc="300" kern="0" dirty="0">
                 <a:solidFill>
-                  <a:srgbClr val="B5893B"/>
+                  <a:srgbClr val="B9781A"/>
                 </a:solidFill>
                 <a:latin typeface="Calibri" pitchFamily="34" charset="0"/>
                 <a:ea typeface="Calibri" pitchFamily="34" charset="-122"/>
@@ -3075,7 +3075,7 @@
           <a:noFill/>
           <a:ln w="25400">
             <a:solidFill>
-              <a:srgbClr val="B5893B"/>
+              <a:srgbClr val="B9781A"/>
             </a:solidFill>
             <a:prstDash val="solid"/>
           </a:ln>
@@ -3107,7 +3107,7 @@
               <a:buNone/>
               <a:defRPr lang="en-US" sz="1000" b="1" spc="300" kern="0" dirty="0">
                 <a:solidFill>
-                  <a:srgbClr val="B5893B"/>
+                  <a:srgbClr val="B9781A"/>
                 </a:solidFill>
                 <a:latin typeface="Calibri" pitchFamily="34" charset="0"/>
                 <a:ea typeface="Calibri" pitchFamily="34" charset="-122"/>
@@ -3289,7 +3289,7 @@
     <p:bg>
       <p:bgPr>
         <a:solidFill>
-          <a:srgbClr val="14213D"/>
+          <a:srgbClr val="1B3A5C"/>
         </a:solidFill>
       </p:bgPr>
     </p:bg>
@@ -3333,7 +3333,7 @@
               <a:buNone/>
               <a:defRPr lang="en-US" sz="1000" b="1" spc="300" kern="0" dirty="0">
                 <a:solidFill>
-                  <a:srgbClr val="B5893B"/>
+                  <a:srgbClr val="B9781A"/>
                 </a:solidFill>
                 <a:latin typeface="Calibri" pitchFamily="34" charset="0"/>
                 <a:ea typeface="Calibri" pitchFamily="34" charset="-122"/>
@@ -3492,7 +3492,7 @@
           <a:noFill/>
           <a:ln w="38100">
             <a:solidFill>
-              <a:srgbClr val="B5893B"/>
+              <a:srgbClr val="B9781A"/>
             </a:solidFill>
             <a:prstDash val="solid"/>
           </a:ln>
@@ -3557,7 +3557,7 @@
           <a:noFill/>
           <a:ln w="38100">
             <a:solidFill>
-              <a:srgbClr val="B5893B"/>
+              <a:srgbClr val="B9781A"/>
             </a:solidFill>
             <a:prstDash val="solid"/>
           </a:ln>
@@ -3622,7 +3622,7 @@
           <a:noFill/>
           <a:ln w="38100">
             <a:solidFill>
-              <a:srgbClr val="B5893B"/>
+              <a:srgbClr val="B9781A"/>
             </a:solidFill>
             <a:prstDash val="solid"/>
           </a:ln>
@@ -3687,7 +3687,7 @@
           <a:noFill/>
           <a:ln w="38100">
             <a:solidFill>
-              <a:srgbClr val="B5893B"/>
+              <a:srgbClr val="B9781A"/>
             </a:solidFill>
             <a:prstDash val="solid"/>
           </a:ln>
@@ -3791,7 +3791,7 @@
     <p:bg>
       <p:bgPr>
         <a:solidFill>
-          <a:srgbClr val="14213D"/>
+          <a:srgbClr val="1B3A5C"/>
         </a:solidFill>
       </p:bgPr>
     </p:bg>
@@ -3826,7 +3826,7 @@
           <a:noFill/>
           <a:ln w="38100">
             <a:solidFill>
-              <a:srgbClr val="B5893B"/>
+              <a:srgbClr val="B9781A"/>
             </a:solidFill>
             <a:prstDash val="solid"/>
           </a:ln>
@@ -3858,7 +3858,7 @@
               <a:buNone/>
               <a:defRPr lang="en-US" sz="1000" b="1" spc="300" kern="0" dirty="0">
                 <a:solidFill>
-                  <a:srgbClr val="B5893B"/>
+                  <a:srgbClr val="B9781A"/>
                 </a:solidFill>
                 <a:latin typeface="Calibri" pitchFamily="34" charset="0"/>
                 <a:ea typeface="Calibri" pitchFamily="34" charset="-122"/>
@@ -3972,7 +3972,7 @@
     <p:bg>
       <p:bgPr>
         <a:solidFill>
-          <a:srgbClr val="14213D"/>
+          <a:srgbClr val="1B3A5C"/>
         </a:solidFill>
       </p:bgPr>
     </p:bg>
@@ -4016,7 +4016,7 @@
               <a:buNone/>
               <a:defRPr lang="en-US" sz="1000" b="1" spc="300" kern="0" dirty="0">
                 <a:solidFill>
-                  <a:srgbClr val="B5893B"/>
+                  <a:srgbClr val="B9781A"/>
                 </a:solidFill>
                 <a:latin typeface="Calibri" pitchFamily="34" charset="0"/>
                 <a:ea typeface="Calibri" pitchFamily="34" charset="-122"/>
@@ -4049,7 +4049,7 @@
           <a:noFill/>
           <a:ln w="38100">
             <a:solidFill>
-              <a:srgbClr val="B5893B"/>
+              <a:srgbClr val="B9781A"/>
             </a:solidFill>
             <a:prstDash val="solid"/>
           </a:ln>
@@ -4227,7 +4227,7 @@
           <a:noFill/>
           <a:ln w="25400">
             <a:solidFill>
-              <a:srgbClr val="B5893B"/>
+              <a:srgbClr val="B9781A"/>
             </a:solidFill>
             <a:prstDash val="solid"/>
           </a:ln>
@@ -4259,7 +4259,7 @@
               <a:buNone/>
               <a:defRPr lang="en-US" sz="1000" b="1" spc="300" kern="0" dirty="0">
                 <a:solidFill>
-                  <a:srgbClr val="B5893B"/>
+                  <a:srgbClr val="B9781A"/>
                 </a:solidFill>
                 <a:latin typeface="Calibri" pitchFamily="34" charset="0"/>
                 <a:ea typeface="Calibri" pitchFamily="34" charset="-122"/>
@@ -4405,7 +4405,7 @@
               <a:buNone/>
               <a:defRPr lang="en-US" sz="6000" b="1" i="1" dirty="0">
                 <a:solidFill>
-                  <a:srgbClr val="B5893B"/>
+                  <a:srgbClr val="B9781A"/>
                 </a:solidFill>
                 <a:latin typeface="Cambria" pitchFamily="34" charset="0"/>
                 <a:ea typeface="Cambria" pitchFamily="34" charset="-122"/>
@@ -4728,7 +4728,7 @@
           <a:noFill/>
           <a:ln w="25400">
             <a:solidFill>
-              <a:srgbClr val="B5893B"/>
+              <a:srgbClr val="B9781A"/>
             </a:solidFill>
             <a:prstDash val="solid"/>
           </a:ln>
@@ -4760,7 +4760,7 @@
               <a:buNone/>
               <a:defRPr lang="en-US" sz="1000" b="1" spc="300" kern="0" dirty="0">
                 <a:solidFill>
-                  <a:srgbClr val="B5893B"/>
+                  <a:srgbClr val="B9781A"/>
                 </a:solidFill>
                 <a:latin typeface="Calibri" pitchFamily="34" charset="0"/>
                 <a:ea typeface="Calibri" pitchFamily="34" charset="-122"/>
@@ -4897,7 +4897,7 @@
           <a:noFill/>
           <a:ln w="19050">
             <a:solidFill>
-              <a:srgbClr val="B5893B"/>
+              <a:srgbClr val="B9781A"/>
             </a:solidFill>
             <a:prstDash val="solid"/>
           </a:ln>
@@ -4929,7 +4929,7 @@
               <a:buNone/>
               <a:defRPr lang="en-US" sz="3000" b="1" i="1" dirty="0">
                 <a:solidFill>
-                  <a:srgbClr val="B5893B"/>
+                  <a:srgbClr val="B9781A"/>
                 </a:solidFill>
                 <a:latin typeface="Cambria" pitchFamily="34" charset="0"/>
                 <a:ea typeface="Cambria" pitchFamily="34" charset="-122"/>
@@ -5046,7 +5046,7 @@
           <a:noFill/>
           <a:ln w="19050">
             <a:solidFill>
-              <a:srgbClr val="B5893B"/>
+              <a:srgbClr val="B9781A"/>
             </a:solidFill>
             <a:prstDash val="solid"/>
           </a:ln>
@@ -5078,7 +5078,7 @@
               <a:buNone/>
               <a:defRPr lang="en-US" sz="3000" b="1" i="1" dirty="0">
                 <a:solidFill>
-                  <a:srgbClr val="B5893B"/>
+                  <a:srgbClr val="B9781A"/>
                 </a:solidFill>
                 <a:latin typeface="Cambria" pitchFamily="34" charset="0"/>
                 <a:ea typeface="Cambria" pitchFamily="34" charset="-122"/>
@@ -5195,7 +5195,7 @@
           <a:noFill/>
           <a:ln w="19050">
             <a:solidFill>
-              <a:srgbClr val="B5893B"/>
+              <a:srgbClr val="B9781A"/>
             </a:solidFill>
             <a:prstDash val="solid"/>
           </a:ln>
@@ -5227,7 +5227,7 @@
               <a:buNone/>
               <a:defRPr lang="en-US" sz="3000" b="1" i="1" dirty="0">
                 <a:solidFill>
-                  <a:srgbClr val="B5893B"/>
+                  <a:srgbClr val="B9781A"/>
                 </a:solidFill>
                 <a:latin typeface="Cambria" pitchFamily="34" charset="0"/>
                 <a:ea typeface="Cambria" pitchFamily="34" charset="-122"/>
@@ -5344,7 +5344,7 @@
           <a:noFill/>
           <a:ln w="19050">
             <a:solidFill>
-              <a:srgbClr val="B5893B"/>
+              <a:srgbClr val="B9781A"/>
             </a:solidFill>
             <a:prstDash val="solid"/>
           </a:ln>
@@ -5376,7 +5376,7 @@
               <a:buNone/>
               <a:defRPr lang="en-US" sz="3000" b="1" i="1" dirty="0">
                 <a:solidFill>
-                  <a:srgbClr val="B5893B"/>
+                  <a:srgbClr val="B9781A"/>
                 </a:solidFill>
                 <a:latin typeface="Cambria" pitchFamily="34" charset="0"/>
                 <a:ea typeface="Cambria" pitchFamily="34" charset="-122"/>
@@ -5699,7 +5699,7 @@
           <a:noFill/>
           <a:ln w="25400">
             <a:solidFill>
-              <a:srgbClr val="B5893B"/>
+              <a:srgbClr val="B9781A"/>
             </a:solidFill>
             <a:prstDash val="solid"/>
           </a:ln>
@@ -5731,7 +5731,7 @@
               <a:buNone/>
               <a:defRPr lang="en-US" sz="1000" b="1" spc="300" kern="0" dirty="0">
                 <a:solidFill>
-                  <a:srgbClr val="B5893B"/>
+                  <a:srgbClr val="B9781A"/>
                 </a:solidFill>
                 <a:latin typeface="Calibri" pitchFamily="34" charset="0"/>
                 <a:ea typeface="Calibri" pitchFamily="34" charset="-122"/>
@@ -5972,7 +5972,7 @@
           <a:noFill/>
           <a:ln w="38100">
             <a:solidFill>
-              <a:srgbClr val="B5893B"/>
+              <a:srgbClr val="B9781A"/>
             </a:solidFill>
             <a:prstDash val="solid"/>
           </a:ln>
@@ -6159,7 +6159,7 @@
           <a:noFill/>
           <a:ln w="25400">
             <a:solidFill>
-              <a:srgbClr val="B5893B"/>
+              <a:srgbClr val="B9781A"/>
             </a:solidFill>
             <a:prstDash val="solid"/>
           </a:ln>
@@ -6191,7 +6191,7 @@
               <a:buNone/>
               <a:defRPr lang="en-US" sz="1000" b="1" spc="300" kern="0" dirty="0">
                 <a:solidFill>
-                  <a:srgbClr val="B5893B"/>
+                  <a:srgbClr val="B9781A"/>
                 </a:solidFill>
                 <a:latin typeface="Calibri" pitchFamily="34" charset="0"/>
                 <a:ea typeface="Calibri" pitchFamily="34" charset="-122"/>
@@ -6618,7 +6618,7 @@
           <a:noFill/>
           <a:ln w="25400">
             <a:solidFill>
-              <a:srgbClr val="B5893B"/>
+              <a:srgbClr val="B9781A"/>
             </a:solidFill>
             <a:prstDash val="solid"/>
           </a:ln>
@@ -6650,7 +6650,7 @@
               <a:buNone/>
               <a:defRPr lang="en-US" sz="1000" b="1" spc="300" kern="0" dirty="0">
                 <a:solidFill>
-                  <a:srgbClr val="B5893B"/>
+                  <a:srgbClr val="B9781A"/>
                 </a:solidFill>
                 <a:latin typeface="Calibri" pitchFamily="34" charset="0"/>
                 <a:ea typeface="Calibri" pitchFamily="34" charset="-122"/>
